--- a/docs/presentation/eg2-practice-team5-jaeung.pptx
+++ b/docs/presentation/eg2-practice-team5-jaeung.pptx
@@ -127,19 +127,19 @@
   <p:extLst>
     <p:ext uri="{521415D9-36F7-43E2-AB2F-B90AF26B5E84}">
       <p14:sectionLst xmlns:p14="http://schemas.microsoft.com/office/powerpoint/2010/main">
-        <p14:section name="본문" id="{a34e00e9-c141-dfe3-b505-9e806b93d7af}">
+        <p14:section name="본문" id="{92e26287-bc8b-c21e-f047-cd29e31774b1}">
           <p14:sldIdLst>
             <p14:sldId id="256"/>
             <p14:sldId id="257"/>
           </p14:sldIdLst>
         </p14:section>
-        <p14:section name="실습 원칙" id="{5db11692-5369-3a04-b8d5-63f181be61e5}">
+        <p14:section name="실습 원칙" id="{2d46f706-d658-666f-69f1-ebac1ba6c985}">
           <p14:sldIdLst>
             <p14:sldId id="258"/>
             <p14:sldId id="259"/>
           </p14:sldIdLst>
         </p14:section>
-        <p14:section name="임베딩 검색" id="{a81acec7-4258-5776-d339-9bad45bdb18d}">
+        <p14:section name="임베딩 검색" id="{92d3a7d6-d65f-c079-bd8a-4b1bbf12a273}">
           <p14:sldIdLst>
             <p14:sldId id="260"/>
             <p14:sldId id="261"/>
@@ -147,13 +147,13 @@
             <p14:sldId id="263"/>
           </p14:sldIdLst>
         </p14:section>
-        <p14:section name="미세조정" id="{718fad6b-9dfb-582f-7bec-f25100c897b2}">
+        <p14:section name="미세조정" id="{8553fa82-cbf2-dab3-0107-c5784db97322}">
           <p14:sldIdLst>
             <p14:sldId id="264"/>
             <p14:sldId id="265"/>
           </p14:sldIdLst>
         </p14:section>
-        <p14:section name="웹캠" id="{8907c7e8-5d52-3637-f7bb-6bec81ef2a47}">
+        <p14:section name="웹캠" id="{43b3ba06-fba4-0633-1c62-86bd54d649de}">
           <p14:sldIdLst>
             <p14:sldId id="266"/>
             <p14:sldId id="267"/>
@@ -161,7 +161,7 @@
             <p14:sldId id="269"/>
           </p14:sldIdLst>
         </p14:section>
-        <p14:section name="카메라 2대" id="{f99952dd-452b-c690-0b4d-445747e0c8de}">
+        <p14:section name="카메라 2대" id="{66855842-42f2-b3da-3c63-8dbff8a6bc1e}">
           <p14:sldIdLst>
             <p14:sldId id="270"/>
             <p14:sldId id="271"/>
@@ -170,7 +170,7 @@
             <p14:sldId id="274"/>
           </p14:sldIdLst>
         </p14:section>
-        <p14:section name="예비 (질문이 나오면)" id="{e726ebd4-3bf2-0548-d396-9a02e9649216}">
+        <p14:section name="예비 (질문이 나오면)" id="{37d2f906-13da-cce9-e5b3-ccc808dbb30e}">
           <p14:sldIdLst>
             <p14:sldId id="275"/>
             <p14:sldId id="276"/>
@@ -2781,7 +2781,7 @@
           <a:lstStyle>
             <a:lvl1pPr algn="l" indent="0" marL="0">
               <a:buNone/>
-              <a:defRPr lang="en-US" sz="5400" dirty="0">
+              <a:defRPr lang="en-US" sz="5400" b="1" dirty="0">
                 <a:solidFill>
                   <a:schemeClr val="tx1"/>
                 </a:solidFill>
@@ -2930,7 +2930,7 @@
           <a:lstStyle>
             <a:lvl1pPr algn="l" indent="0" marL="0">
               <a:buNone/>
-              <a:defRPr lang="en-US" sz="5400" dirty="0">
+              <a:defRPr lang="en-US" sz="5400" b="1" dirty="0">
                 <a:solidFill>
                   <a:schemeClr val="tx1"/>
                 </a:solidFill>
@@ -3079,7 +3079,7 @@
           <a:lstStyle>
             <a:lvl1pPr algn="l" indent="0" marL="0">
               <a:buNone/>
-              <a:defRPr lang="en-US" sz="6000" dirty="0">
+              <a:defRPr lang="en-US" sz="6000" b="1" dirty="0">
                 <a:solidFill>
                   <a:schemeClr val="accent1"/>
                 </a:solidFill>
@@ -3121,7 +3121,7 @@
           <a:lstStyle>
             <a:lvl1pPr algn="l" indent="0" marL="0">
               <a:buNone/>
-              <a:defRPr lang="en-US" sz="4000" dirty="0">
+              <a:defRPr lang="en-US" sz="4000" b="1" dirty="0">
                 <a:solidFill>
                   <a:schemeClr val="bg1"/>
                 </a:solidFill>
@@ -3270,7 +3270,7 @@
           <a:lstStyle>
             <a:lvl1pPr algn="l" indent="0" marL="0">
               <a:buNone/>
-              <a:defRPr lang="en-US" sz="3200" dirty="0">
+              <a:defRPr lang="en-US" sz="3200" b="1" dirty="0">
                 <a:solidFill>
                   <a:schemeClr val="tx1"/>
                 </a:solidFill>
@@ -3386,7 +3386,7 @@
           <a:lstStyle>
             <a:lvl1pPr algn="l" indent="0" marL="0">
               <a:buNone/>
-              <a:defRPr lang="en-US" sz="3200" dirty="0">
+              <a:defRPr lang="en-US" sz="3200" b="1" dirty="0">
                 <a:solidFill>
                   <a:schemeClr val="bg1"/>
                 </a:solidFill>
@@ -3780,7 +3780,7 @@
               <a:buNone/>
             </a:pPr>
             <a:r>
-              <a:rPr lang="en-US" sz="5400" dirty="0">
+              <a:rPr lang="en-US" sz="5400" b="1" dirty="0">
                 <a:solidFill>
                   <a:schemeClr val="tx1"/>
                 </a:solidFill>
@@ -4203,7 +4203,7 @@
               <a:buNone/>
             </a:pPr>
             <a:r>
-              <a:rPr lang="en-US" sz="3200" dirty="0">
+              <a:rPr lang="en-US" sz="3200" b="1" dirty="0">
                 <a:solidFill>
                   <a:schemeClr val="tx1"/>
                 </a:solidFill>
@@ -5053,7 +5053,7 @@
               <a:buNone/>
             </a:pPr>
             <a:r>
-              <a:rPr lang="en-US" sz="6000" dirty="0">
+              <a:rPr lang="en-US" sz="6000" b="1" dirty="0">
                 <a:solidFill>
                   <a:schemeClr val="accent1"/>
                 </a:solidFill>
@@ -5094,7 +5094,7 @@
               <a:buNone/>
             </a:pPr>
             <a:r>
-              <a:rPr lang="en-US" sz="4000" dirty="0">
+              <a:rPr lang="en-US" sz="4000" b="1" dirty="0">
                 <a:solidFill>
                   <a:schemeClr val="bg1"/>
                 </a:solidFill>
@@ -5233,7 +5233,7 @@
               <a:buNone/>
             </a:pPr>
             <a:r>
-              <a:rPr lang="en-US" sz="3200" dirty="0">
+              <a:rPr lang="en-US" sz="3200" b="1" dirty="0">
                 <a:solidFill>
                   <a:schemeClr val="tx1"/>
                 </a:solidFill>
@@ -5304,7 +5304,7 @@
       </p:sp>
       <p:pic>
         <p:nvPicPr>
-          <p:cNvPr id="6" name="screenshot" descr="/tmp/ccp-924-ut8zub7xfr.png">    </p:cNvPr>
+          <p:cNvPr id="6" name="screenshot" descr="/tmp/ccp-1354-6avc2cobkx.png">    </p:cNvPr>
           <p:cNvPicPr>
             <a:picLocks noChangeAspect="1"/>
           </p:cNvPicPr>
@@ -5544,7 +5544,7 @@
               <a:buNone/>
             </a:pPr>
             <a:r>
-              <a:rPr lang="en-US" sz="3200" dirty="0">
+              <a:rPr lang="en-US" sz="3200" b="1" dirty="0">
                 <a:solidFill>
                   <a:schemeClr val="tx1"/>
                 </a:solidFill>
@@ -6651,7 +6651,7 @@
               <a:buNone/>
             </a:pPr>
             <a:r>
-              <a:rPr lang="en-US" sz="3200" dirty="0">
+              <a:rPr lang="en-US" sz="3200" b="1" dirty="0">
                 <a:solidFill>
                   <a:schemeClr val="tx1"/>
                 </a:solidFill>
@@ -7644,7 +7644,7 @@
               <a:buNone/>
             </a:pPr>
             <a:r>
-              <a:rPr lang="en-US" sz="6000" dirty="0">
+              <a:rPr lang="en-US" sz="6000" b="1" dirty="0">
                 <a:solidFill>
                   <a:schemeClr val="accent1"/>
                 </a:solidFill>
@@ -7685,7 +7685,7 @@
               <a:buNone/>
             </a:pPr>
             <a:r>
-              <a:rPr lang="en-US" sz="4000" dirty="0">
+              <a:rPr lang="en-US" sz="4000" b="1" dirty="0">
                 <a:solidFill>
                   <a:schemeClr val="bg1"/>
                 </a:solidFill>
@@ -7824,7 +7824,7 @@
               <a:buNone/>
             </a:pPr>
             <a:r>
-              <a:rPr lang="en-US" sz="3200" dirty="0">
+              <a:rPr lang="en-US" sz="3200" b="1" dirty="0">
                 <a:solidFill>
                   <a:schemeClr val="tx1"/>
                 </a:solidFill>
@@ -9074,7 +9074,7 @@
               <a:buNone/>
             </a:pPr>
             <a:r>
-              <a:rPr lang="en-US" sz="3200" dirty="0">
+              <a:rPr lang="en-US" sz="3200" b="1" dirty="0">
                 <a:solidFill>
                   <a:schemeClr val="tx1"/>
                 </a:solidFill>
@@ -10047,7 +10047,7 @@
               <a:buNone/>
             </a:pPr>
             <a:r>
-              <a:rPr lang="en-US" sz="3200" dirty="0">
+              <a:rPr lang="en-US" sz="3200" b="1" dirty="0">
                 <a:solidFill>
                   <a:schemeClr val="tx1"/>
                 </a:solidFill>
@@ -10609,7 +10609,7 @@
               <a:buNone/>
             </a:pPr>
             <a:r>
-              <a:rPr lang="en-US" sz="3200" dirty="0">
+              <a:rPr lang="en-US" sz="3200" b="1" dirty="0">
                 <a:solidFill>
                   <a:schemeClr val="bg1"/>
                 </a:solidFill>
@@ -11214,7 +11214,7 @@
               <a:buNone/>
             </a:pPr>
             <a:r>
-              <a:rPr lang="en-US" sz="3200" dirty="0">
+              <a:rPr lang="en-US" sz="3200" b="1" dirty="0">
                 <a:solidFill>
                   <a:schemeClr val="tx1"/>
                 </a:solidFill>
@@ -13012,7 +13012,7 @@
               <a:buNone/>
             </a:pPr>
             <a:r>
-              <a:rPr lang="en-US" sz="3200" dirty="0">
+              <a:rPr lang="en-US" sz="3200" b="1" dirty="0">
                 <a:solidFill>
                   <a:schemeClr val="tx1"/>
                 </a:solidFill>
@@ -13880,7 +13880,7 @@
               <a:buNone/>
             </a:pPr>
             <a:r>
-              <a:rPr lang="en-US" sz="3200" dirty="0">
+              <a:rPr lang="en-US" sz="3200" b="1" dirty="0">
                 <a:solidFill>
                   <a:schemeClr val="tx1"/>
                 </a:solidFill>
@@ -14710,7 +14710,7 @@
               <a:buNone/>
             </a:pPr>
             <a:r>
-              <a:rPr lang="en-US" sz="6000" dirty="0">
+              <a:rPr lang="en-US" sz="6000" b="1" dirty="0">
                 <a:solidFill>
                   <a:schemeClr val="accent1"/>
                 </a:solidFill>
@@ -14751,7 +14751,7 @@
               <a:buNone/>
             </a:pPr>
             <a:r>
-              <a:rPr lang="en-US" sz="4000" dirty="0">
+              <a:rPr lang="en-US" sz="4000" b="1" dirty="0">
                 <a:solidFill>
                   <a:schemeClr val="bg1"/>
                 </a:solidFill>
@@ -14890,7 +14890,7 @@
               <a:buNone/>
             </a:pPr>
             <a:r>
-              <a:rPr lang="en-US" sz="3200" dirty="0">
+              <a:rPr lang="en-US" sz="3200" b="1" dirty="0">
                 <a:solidFill>
                   <a:schemeClr val="tx1"/>
                 </a:solidFill>
@@ -15449,7 +15449,7 @@
               <a:buNone/>
             </a:pPr>
             <a:r>
-              <a:rPr lang="en-US" sz="6000" dirty="0">
+              <a:rPr lang="en-US" sz="6000" b="1" dirty="0">
                 <a:solidFill>
                   <a:schemeClr val="accent1"/>
                 </a:solidFill>
@@ -15490,7 +15490,7 @@
               <a:buNone/>
             </a:pPr>
             <a:r>
-              <a:rPr lang="en-US" sz="4000" dirty="0">
+              <a:rPr lang="en-US" sz="4000" b="1" dirty="0">
                 <a:solidFill>
                   <a:schemeClr val="bg1"/>
                 </a:solidFill>
@@ -15629,7 +15629,7 @@
               <a:buNone/>
             </a:pPr>
             <a:r>
-              <a:rPr lang="en-US" sz="3200" dirty="0">
+              <a:rPr lang="en-US" sz="3200" b="1" dirty="0">
                 <a:solidFill>
                   <a:schemeClr val="tx1"/>
                 </a:solidFill>
@@ -16386,7 +16386,7 @@
               <a:buNone/>
             </a:pPr>
             <a:r>
-              <a:rPr lang="en-US" sz="3200" dirty="0">
+              <a:rPr lang="en-US" sz="3200" b="1" dirty="0">
                 <a:solidFill>
                   <a:schemeClr val="tx1"/>
                 </a:solidFill>
@@ -16820,7 +16820,7 @@
               <a:buNone/>
             </a:pPr>
             <a:r>
-              <a:rPr lang="en-US" sz="3200" dirty="0">
+              <a:rPr lang="en-US" sz="3200" b="1" dirty="0">
                 <a:solidFill>
                   <a:schemeClr val="tx1"/>
                 </a:solidFill>
@@ -17063,7 +17063,7 @@
               <a:buNone/>
             </a:pPr>
             <a:r>
-              <a:rPr lang="en-US" sz="6000" dirty="0">
+              <a:rPr lang="en-US" sz="6000" b="1" dirty="0">
                 <a:solidFill>
                   <a:schemeClr val="accent1"/>
                 </a:solidFill>
@@ -17104,7 +17104,7 @@
               <a:buNone/>
             </a:pPr>
             <a:r>
-              <a:rPr lang="en-US" sz="4000" dirty="0">
+              <a:rPr lang="en-US" sz="4000" b="1" dirty="0">
                 <a:solidFill>
                   <a:schemeClr val="bg1"/>
                 </a:solidFill>
@@ -17204,11 +17204,11 @@
     </a:clrScheme>
     <a:fontScheme name="Cream Coral">
       <a:majorFont>
-        <a:latin typeface="Noto Serif KR"/>
-        <a:ea typeface="Noto Serif KR"/>
+        <a:latin typeface="Pretendard"/>
+        <a:ea typeface="Pretendard"/>
         <a:cs typeface=""/>
         <a:font script="Jpan" typeface="游ゴシック Light"/>
-        <a:font script="Hang" typeface="Noto Serif KR"/>
+        <a:font script="Hang" typeface="Pretendard"/>
         <a:font script="Hans" typeface="等线 Light"/>
         <a:font script="Hant" typeface="新細明體"/>
         <a:font script="Arab" typeface="Times New Roman"/>
@@ -17256,11 +17256,11 @@
         <a:font script="Tfng" typeface="Ebrima"/>
       </a:majorFont>
       <a:minorFont>
-        <a:latin typeface="Pretendard"/>
-        <a:ea typeface="Pretendard"/>
+        <a:latin typeface="Pretendard SemiBold"/>
+        <a:ea typeface="Pretendard SemiBold"/>
         <a:cs typeface=""/>
         <a:font script="Jpan" typeface="游ゴシック"/>
-        <a:font script="Hang" typeface="Pretendard"/>
+        <a:font script="Hang" typeface="Pretendard SemiBold"/>
         <a:font script="Hans" typeface="等线"/>
         <a:font script="Hant" typeface="新細明體"/>
         <a:font script="Arab" typeface="Arial"/>
